--- a/docs/ppt/quality-stages_deck-studio.pptx
+++ b/docs/ppt/quality-stages_deck-studio.pptx
@@ -11,8 +11,6 @@
     <p:sldId id="259" r:id="rId5"/>
     <p:sldId id="260" r:id="rId6"/>
     <p:sldId id="261" r:id="rId7"/>
-    <p:sldId id="262" r:id="rId8"/>
-    <p:sldId id="263" r:id="rId9"/>
   </p:sldIdLst>
   <p:sldSz cx="12192000" cy="6858000"/>
   <p:notesSz cx="6858000" cy="9144000"/>
@@ -868,90 +866,6 @@
 </p:sld>
 </file>
 
-<file path=ppt/slides/slide7.xml><?xml version="1.0" encoding="utf-8"?>
-<p:sld xmlns:p="http://schemas.openxmlformats.org/presentationml/2006/main" xmlns:a="http://schemas.openxmlformats.org/drawingml/2006/main" xmlns:r="http://schemas.openxmlformats.org/officeDocument/2006/relationships">
-  <p:cSld>
-    <p:spTree>
-      <p:nvGrpSpPr>
-        <p:cNvPr id="1" name=""/>
-        <p:cNvGrpSpPr/>
-        <p:nvPr/>
-      </p:nvGrpSpPr>
-      <p:grpSpPr/>
-      <p:pic>
-        <p:nvPicPr>
-          <p:cNvPr id="2" name="slide-007.jpg"/>
-          <p:cNvPicPr>
-            <a:picLocks noChangeAspect="1"/>
-          </p:cNvPicPr>
-          <p:nvPr/>
-        </p:nvPicPr>
-        <p:blipFill>
-          <a:blip r:embed="rId2"/>
-          <a:stretch>
-            <a:fillRect/>
-          </a:stretch>
-        </p:blipFill>
-        <p:spPr>
-          <a:xfrm>
-            <a:off x="0" y="0"/>
-            <a:ext cx="12192000" cy="6858000"/>
-          </a:xfrm>
-          <a:prstGeom prst="rect">
-            <a:avLst/>
-          </a:prstGeom>
-        </p:spPr>
-      </p:pic>
-    </p:spTree>
-  </p:cSld>
-  <p:clrMapOvr>
-    <a:masterClrMapping/>
-  </p:clrMapOvr>
-</p:sld>
-</file>
-
-<file path=ppt/slides/slide8.xml><?xml version="1.0" encoding="utf-8"?>
-<p:sld xmlns:p="http://schemas.openxmlformats.org/presentationml/2006/main" xmlns:a="http://schemas.openxmlformats.org/drawingml/2006/main" xmlns:r="http://schemas.openxmlformats.org/officeDocument/2006/relationships">
-  <p:cSld>
-    <p:spTree>
-      <p:nvGrpSpPr>
-        <p:cNvPr id="1" name=""/>
-        <p:cNvGrpSpPr/>
-        <p:nvPr/>
-      </p:nvGrpSpPr>
-      <p:grpSpPr/>
-      <p:pic>
-        <p:nvPicPr>
-          <p:cNvPr id="2" name="slide-008.jpg"/>
-          <p:cNvPicPr>
-            <a:picLocks noChangeAspect="1"/>
-          </p:cNvPicPr>
-          <p:nvPr/>
-        </p:nvPicPr>
-        <p:blipFill>
-          <a:blip r:embed="rId2"/>
-          <a:stretch>
-            <a:fillRect/>
-          </a:stretch>
-        </p:blipFill>
-        <p:spPr>
-          <a:xfrm>
-            <a:off x="0" y="0"/>
-            <a:ext cx="12192000" cy="6858000"/>
-          </a:xfrm>
-          <a:prstGeom prst="rect">
-            <a:avLst/>
-          </a:prstGeom>
-        </p:spPr>
-      </p:pic>
-    </p:spTree>
-  </p:cSld>
-  <p:clrMapOvr>
-    <a:masterClrMapping/>
-  </p:clrMapOvr>
-</p:sld>
-</file>
-
 <file path=ppt/theme/theme1.xml><?xml version="1.0" encoding="utf-8"?>
 <!-- 空白母版、版式与主题取自 python-pptx 1.0.2 的默认有效文稿；母版只保留空白版式。 -->
 <a:theme xmlns:a="http://schemas.openxmlformats.org/drawingml/2006/main" name="Office Theme">
